--- a/02-CCNA-200-301-v7/01-CCNA-IntroducaoAsRedes-v7.02/01-Modulo01-PPTS/Modulo05-SistemaNumerico.pptx
+++ b/02-CCNA-200-301-v7/01-CCNA-IntroducaoAsRedes-v7.02/01-Modulo01-PPTS/Modulo05-SistemaNumerico.pptx
@@ -23462,7 +23462,7 @@
                   </a:schemeClr>
                 </a:solidFill>
               </a:rPr>
-              <a:t>Módulo 5: Sistemas numéricos</a:t>
+              <a:t>Módulo 5: Sistemas Numéricos</a:t>
             </a:r>
             <a:endParaRPr lang="pt-BR">
               <a:solidFill>
@@ -23766,7 +23766,7 @@
         </p:nvSpPr>
         <p:spPr>
           <a:xfrm>
-            <a:off x="416425" y="1788160"/>
+            <a:off x="416425" y="2239010"/>
             <a:ext cx="7848344" cy="929640"/>
           </a:xfrm>
         </p:spPr>
@@ -23784,7 +23784,7 @@
                   </a:schemeClr>
                 </a:solidFill>
               </a:rPr>
-              <a:t>5.2 - Sistema de numeração hexadecimal</a:t>
+              <a:t>5.2 - Sistema de Numeração Hexadecimal</a:t>
             </a:r>
             <a:endParaRPr lang="pt-BR">
               <a:solidFill>
@@ -23851,14 +23851,14 @@
             <a:pPr rtl="0"/>
             <a:r>
               <a:rPr lang="pt-BR" sz="1600"/>
-              <a:t>Sistema de numeração hexadecimal</a:t>
+              <a:t>Sistema de Numeração Hexadecimal</a:t>
             </a:r>
             <a:br>
               <a:rPr lang="en-US" dirty="0"/>
             </a:br>
             <a:r>
               <a:rPr lang="pt-BR" sz="2400"/>
-              <a:t>Endereços hexadecimais e IPv6</a:t>
+              <a:t>Endereços Hexadecimais e IPv6</a:t>
             </a:r>
             <a:endParaRPr lang="pt-BR" sz="2400"/>
           </a:p>
@@ -23876,84 +23876,216 @@
         </p:nvSpPr>
         <p:spPr>
           <a:xfrm>
-            <a:off x="474663" y="763736"/>
-            <a:ext cx="3331794" cy="3657998"/>
+            <a:off x="96520" y="662305"/>
+            <a:ext cx="3331845" cy="3996055"/>
           </a:xfrm>
         </p:spPr>
         <p:txBody>
           <a:bodyPr/>
           <a:lstStyle/>
           <a:p>
-            <a:pPr marL="342900" indent="-342900" algn="l" rtl="0">
+            <a:pPr marL="0" indent="0" algn="just" rtl="0">
               <a:buFont typeface="Arial" panose="020B0604020202020204" pitchFamily="34" charset="0"/>
-              <a:buChar char="•"/>
             </a:pPr>
             <a:r>
-              <a:rPr lang="pt-BR" sz="1600">
+              <a:rPr lang="pt-BR" sz="1650">
                 <a:solidFill>
                   <a:srgbClr val="000000"/>
                 </a:solidFill>
               </a:rPr>
-              <a:t>Para entender endereços IPv6, você deve ser capaz de converter hexadecimal para decimal e vice-versa.</a:t>
+              <a:t>Para entender </a:t>
             </a:r>
-            <a:endParaRPr lang="pt-BR" sz="1600">
+            <a:r>
+              <a:rPr lang="pt-BR" sz="1650" b="1">
+                <a:solidFill>
+                  <a:srgbClr val="FF0000"/>
+                </a:solidFill>
+              </a:rPr>
+              <a:t>Endereços IPv6</a:t>
+            </a:r>
+            <a:r>
+              <a:rPr lang="pt-BR" sz="1650">
+                <a:solidFill>
+                  <a:srgbClr val="000000"/>
+                </a:solidFill>
+              </a:rPr>
+              <a:t>, você deve ser capaz de </a:t>
+            </a:r>
+            <a:r>
+              <a:rPr lang="pt-BR" sz="1650" b="1">
+                <a:solidFill>
+                  <a:srgbClr val="FF0000"/>
+                </a:solidFill>
+              </a:rPr>
+              <a:t>converter hexadecimal para decimal e vice-versa</a:t>
+            </a:r>
+            <a:r>
+              <a:rPr lang="pt-BR" sz="1650">
+                <a:solidFill>
+                  <a:srgbClr val="000000"/>
+                </a:solidFill>
+              </a:rPr>
+              <a:t>.</a:t>
+            </a:r>
+            <a:endParaRPr lang="pt-BR" sz="1650">
               <a:solidFill>
                 <a:srgbClr val="000000"/>
               </a:solidFill>
             </a:endParaRPr>
           </a:p>
           <a:p>
-            <a:pPr marL="342900" indent="-342900" algn="l" rtl="0">
+            <a:pPr marL="0" indent="0" algn="just" rtl="0">
               <a:buFont typeface="Arial" panose="020B0604020202020204" pitchFamily="34" charset="0"/>
-              <a:buChar char="•"/>
             </a:pPr>
             <a:r>
-              <a:rPr lang="pt-BR" sz="1600">
+              <a:rPr lang="pt-BR" sz="1650">
                 <a:solidFill>
                   <a:srgbClr val="000000"/>
                 </a:solidFill>
               </a:rPr>
-              <a:t>Hexadecimal é um sistema de numeração de base dezesseis, usando os dígitos de 0 a 9 e as letras de A a F.</a:t>
+              <a:t>Hexadecimal é um sistema de </a:t>
             </a:r>
-            <a:endParaRPr lang="pt-BR" sz="1600">
+            <a:r>
+              <a:rPr lang="pt-BR" sz="1650" b="1">
+                <a:solidFill>
+                  <a:srgbClr val="FF0000"/>
+                </a:solidFill>
+              </a:rPr>
+              <a:t>numeração de base dezesseis</a:t>
+            </a:r>
+            <a:r>
+              <a:rPr lang="pt-BR" sz="1650">
+                <a:solidFill>
+                  <a:srgbClr val="000000"/>
+                </a:solidFill>
+              </a:rPr>
+              <a:t>, usando os dígitos de </a:t>
+            </a:r>
+            <a:r>
+              <a:rPr lang="pt-BR" sz="1650" b="1">
+                <a:solidFill>
+                  <a:srgbClr val="FF0000"/>
+                </a:solidFill>
+              </a:rPr>
+              <a:t>0 a 9</a:t>
+            </a:r>
+            <a:r>
+              <a:rPr lang="pt-BR" sz="1650">
+                <a:solidFill>
+                  <a:srgbClr val="000000"/>
+                </a:solidFill>
+              </a:rPr>
+              <a:t> e as letras de </a:t>
+            </a:r>
+            <a:r>
+              <a:rPr lang="pt-BR" sz="1650" b="1">
+                <a:solidFill>
+                  <a:srgbClr val="FF0000"/>
+                </a:solidFill>
+              </a:rPr>
+              <a:t>A a F</a:t>
+            </a:r>
+            <a:r>
+              <a:rPr lang="pt-BR" sz="1650">
+                <a:solidFill>
+                  <a:srgbClr val="000000"/>
+                </a:solidFill>
+              </a:rPr>
+              <a:t>.</a:t>
+            </a:r>
+            <a:endParaRPr lang="pt-BR" sz="1650">
               <a:solidFill>
                 <a:srgbClr val="000000"/>
               </a:solidFill>
             </a:endParaRPr>
           </a:p>
           <a:p>
-            <a:pPr marL="342900" indent="-342900" algn="l" rtl="0">
+            <a:pPr marL="0" indent="0" algn="just" rtl="0">
               <a:buFont typeface="Arial" panose="020B0604020202020204" pitchFamily="34" charset="0"/>
-              <a:buChar char="•"/>
             </a:pPr>
             <a:r>
-              <a:rPr lang="pt-BR" sz="1600">
+              <a:rPr lang="pt-BR" sz="1650">
                 <a:solidFill>
                   <a:srgbClr val="000000"/>
                 </a:solidFill>
               </a:rPr>
-              <a:t>É mais fácil expressar um valor como um único dígito hexadecimal do que como quatro bits binários.</a:t>
+              <a:t>É mais fácil expressar um valor como um único dígito hexadecimal do que como</a:t>
             </a:r>
-            <a:endParaRPr lang="pt-BR" sz="1600">
+            <a:r>
+              <a:rPr lang="pt-BR" sz="1650" b="1">
+                <a:solidFill>
+                  <a:srgbClr val="000000"/>
+                </a:solidFill>
+              </a:rPr>
+              <a:t> </a:t>
+            </a:r>
+            <a:r>
+              <a:rPr lang="pt-BR" sz="1650" b="1">
+                <a:solidFill>
+                  <a:srgbClr val="FF0000"/>
+                </a:solidFill>
+              </a:rPr>
+              <a:t>quatro bits binários</a:t>
+            </a:r>
+            <a:r>
+              <a:rPr lang="pt-BR" sz="1650">
+                <a:solidFill>
+                  <a:srgbClr val="000000"/>
+                </a:solidFill>
+              </a:rPr>
+              <a:t>.</a:t>
+            </a:r>
+            <a:endParaRPr lang="pt-BR" sz="1650">
               <a:solidFill>
                 <a:srgbClr val="000000"/>
               </a:solidFill>
             </a:endParaRPr>
           </a:p>
           <a:p>
-            <a:pPr marL="342900" indent="-342900" algn="l" rtl="0">
+            <a:pPr marL="0" indent="0" algn="just" rtl="0">
               <a:buFont typeface="Arial" panose="020B0604020202020204" pitchFamily="34" charset="0"/>
-              <a:buChar char="•"/>
             </a:pPr>
             <a:r>
-              <a:rPr lang="pt-BR" sz="1600">
+              <a:rPr lang="pt-BR" sz="1650">
                 <a:solidFill>
                   <a:srgbClr val="000000"/>
                 </a:solidFill>
               </a:rPr>
-              <a:t>Hexadecimal é usado para representar endereços IPv6 e endereços MAC.</a:t>
+              <a:t>Hexadecimal é usado para representar </a:t>
             </a:r>
-            <a:endParaRPr lang="pt-BR" sz="1600">
+            <a:r>
+              <a:rPr lang="pt-BR" sz="1650" b="1">
+                <a:solidFill>
+                  <a:srgbClr val="FF0000"/>
+                </a:solidFill>
+              </a:rPr>
+              <a:t>endereços IPv6</a:t>
+            </a:r>
+            <a:r>
+              <a:rPr lang="pt-BR" sz="1650">
+                <a:solidFill>
+                  <a:srgbClr val="FF0000"/>
+                </a:solidFill>
+              </a:rPr>
+              <a:t> e </a:t>
+            </a:r>
+            <a:r>
+              <a:rPr lang="pt-BR" sz="1650" b="1">
+                <a:solidFill>
+                  <a:srgbClr val="FF0000"/>
+                </a:solidFill>
+              </a:rPr>
+              <a:t>endereços MAC</a:t>
+            </a:r>
+            <a:r>
+              <a:rPr lang="pt-BR" sz="1650">
+                <a:solidFill>
+                  <a:srgbClr val="000000"/>
+                </a:solidFill>
+              </a:rPr>
+              <a:t>.</a:t>
+            </a:r>
+            <a:endParaRPr lang="pt-BR" sz="1650">
               <a:solidFill>
                 <a:srgbClr val="000000"/>
               </a:solidFill>
@@ -23963,22 +24095,37 @@
       </p:sp>
       <p:pic>
         <p:nvPicPr>
-          <p:cNvPr id="7" name="Picture 6"/>
+          <p:cNvPr id="2" name="Imagem 1"/>
           <p:cNvPicPr>
             <a:picLocks noChangeAspect="1"/>
           </p:cNvPicPr>
           <p:nvPr/>
         </p:nvPicPr>
         <p:blipFill>
-          <a:blip r:embed="rId1"/>
+          <a:blip r:embed="rId1">
+            <a:clrChange>
+              <a:clrFrom>
+                <a:srgbClr val="FFFFFF">
+                  <a:alpha val="100000"/>
+                </a:srgbClr>
+              </a:clrFrom>
+              <a:clrTo>
+                <a:srgbClr val="FFFFFF">
+                  <a:alpha val="100000"/>
+                  <a:alpha val="0"/>
+                </a:srgbClr>
+              </a:clrTo>
+            </a:clrChange>
+          </a:blip>
+          <a:srcRect l="11542" t="38192" r="10646" b="14115"/>
           <a:stretch>
             <a:fillRect/>
           </a:stretch>
         </p:blipFill>
         <p:spPr>
           <a:xfrm>
-            <a:off x="3970337" y="763736"/>
-            <a:ext cx="4699000" cy="3136900"/>
+            <a:off x="3428365" y="784860"/>
+            <a:ext cx="5649595" cy="3751580"/>
           </a:xfrm>
           <a:prstGeom prst="rect">
             <a:avLst/>
@@ -24045,14 +24192,14 @@
             <a:pPr rtl="0"/>
             <a:r>
               <a:rPr lang="pt-BR" sz="1600"/>
-              <a:t>Sistema numérico hexadecimal</a:t>
+              <a:t>Sistema Numérição Hexadecimal</a:t>
             </a:r>
             <a:br>
               <a:rPr lang="en-US" dirty="0"/>
             </a:br>
             <a:r>
               <a:rPr lang="pt-BR" sz="2400"/>
-              <a:t> Endereços hexadecimal e IPv6 (cont.)</a:t>
+              <a:t>Endereços Hexadecimal e IPv6 (continuação)</a:t>
             </a:r>
             <a:endParaRPr lang="pt-BR" sz="2400"/>
           </a:p>
@@ -24070,65 +24217,190 @@
         </p:nvSpPr>
         <p:spPr>
           <a:xfrm>
-            <a:off x="474663" y="763736"/>
-            <a:ext cx="3331794" cy="3657998"/>
+            <a:off x="118745" y="742315"/>
+            <a:ext cx="3331845" cy="3890645"/>
           </a:xfrm>
         </p:spPr>
         <p:txBody>
           <a:bodyPr/>
           <a:lstStyle/>
           <a:p>
-            <a:pPr marL="342900" indent="-342900" algn="l" rtl="0">
+            <a:pPr marL="0" indent="0" algn="just" rtl="0">
               <a:buFont typeface="Arial" panose="020B0604020202020204" pitchFamily="34" charset="0"/>
-              <a:buChar char="•"/>
             </a:pPr>
             <a:r>
-              <a:rPr lang="pt-BR" sz="1600">
+              <a:rPr lang="pt-BR" sz="1700">
                 <a:solidFill>
                   <a:srgbClr val="000000"/>
                 </a:solidFill>
               </a:rPr>
-              <a:t>Endereços IPv6 têm 128 bits de comprimento. Cada 4 bits é representado por um único dígito hexadecimal Isso torna o endereço IPv6 um total de 32 valores hexadecimais.</a:t>
+              <a:t>Endereços </a:t>
             </a:r>
-            <a:endParaRPr lang="pt-BR" sz="1600">
+            <a:r>
+              <a:rPr lang="pt-BR" sz="1700" b="1">
+                <a:solidFill>
+                  <a:srgbClr val="FF0000"/>
+                </a:solidFill>
+              </a:rPr>
+              <a:t>IPv6 têm 128 bits</a:t>
+            </a:r>
+            <a:r>
+              <a:rPr lang="pt-BR" sz="1700">
+                <a:solidFill>
+                  <a:srgbClr val="000000"/>
+                </a:solidFill>
+              </a:rPr>
+              <a:t> de comprimento. Cada </a:t>
+            </a:r>
+            <a:r>
+              <a:rPr lang="pt-BR" sz="1700" b="1">
+                <a:solidFill>
+                  <a:srgbClr val="FF0000"/>
+                </a:solidFill>
+              </a:rPr>
+              <a:t>4 bits</a:t>
+            </a:r>
+            <a:r>
+              <a:rPr lang="pt-BR" sz="1700">
+                <a:solidFill>
+                  <a:srgbClr val="000000"/>
+                </a:solidFill>
+              </a:rPr>
+              <a:t> é representado por um único </a:t>
+            </a:r>
+            <a:r>
+              <a:rPr lang="pt-BR" sz="1700" b="1">
+                <a:solidFill>
+                  <a:srgbClr val="FF0000"/>
+                </a:solidFill>
+              </a:rPr>
+              <a:t>dígito hexadecimal</a:t>
+            </a:r>
+            <a:r>
+              <a:rPr lang="pt-BR" sz="1700">
+                <a:solidFill>
+                  <a:srgbClr val="000000"/>
+                </a:solidFill>
+              </a:rPr>
+              <a:t> Isso torna o endereço </a:t>
+            </a:r>
+            <a:r>
+              <a:rPr lang="pt-BR" sz="1700" b="1">
+                <a:solidFill>
+                  <a:srgbClr val="FF0000"/>
+                </a:solidFill>
+              </a:rPr>
+              <a:t>IPv6 um total de 32 valores hexadecimais</a:t>
+            </a:r>
+            <a:r>
+              <a:rPr lang="pt-BR" sz="1700">
+                <a:solidFill>
+                  <a:srgbClr val="000000"/>
+                </a:solidFill>
+              </a:rPr>
+              <a:t>.</a:t>
+            </a:r>
+            <a:endParaRPr lang="pt-BR" sz="1700">
               <a:solidFill>
                 <a:srgbClr val="000000"/>
               </a:solidFill>
             </a:endParaRPr>
           </a:p>
           <a:p>
-            <a:pPr marL="342900" indent="-342900" algn="l" rtl="0">
+            <a:pPr marL="0" indent="0" algn="just" rtl="0">
               <a:buFont typeface="Arial" panose="020B0604020202020204" pitchFamily="34" charset="0"/>
-              <a:buChar char="•"/>
             </a:pPr>
             <a:r>
-              <a:rPr lang="pt-BR" sz="1600">
+              <a:rPr lang="pt-BR" sz="1700">
                 <a:solidFill>
                   <a:srgbClr val="000000"/>
                 </a:solidFill>
               </a:rPr>
-              <a:t>A figura mostra o método preferido de escrever um endereço IPv6, com cada X representando quatro valores hexadecimais.</a:t>
+              <a:t>A figura mostra o método preferido de escrever um endereço </a:t>
             </a:r>
-            <a:endParaRPr lang="pt-BR" sz="1600">
+            <a:r>
+              <a:rPr lang="pt-BR" sz="1700" b="1">
+                <a:solidFill>
+                  <a:srgbClr val="FF0000"/>
+                </a:solidFill>
+              </a:rPr>
+              <a:t>IPv6</a:t>
+            </a:r>
+            <a:r>
+              <a:rPr lang="pt-BR" sz="1700">
+                <a:solidFill>
+                  <a:srgbClr val="000000"/>
+                </a:solidFill>
+              </a:rPr>
+              <a:t>, com cada </a:t>
+            </a:r>
+            <a:r>
+              <a:rPr lang="pt-BR" sz="1700" b="1">
+                <a:solidFill>
+                  <a:srgbClr val="000000"/>
+                </a:solidFill>
+              </a:rPr>
+              <a:t>X </a:t>
+            </a:r>
+            <a:r>
+              <a:rPr lang="pt-BR" sz="1700">
+                <a:solidFill>
+                  <a:srgbClr val="000000"/>
+                </a:solidFill>
+              </a:rPr>
+              <a:t>representando </a:t>
+            </a:r>
+            <a:r>
+              <a:rPr lang="pt-BR" sz="1700" b="1">
+                <a:solidFill>
+                  <a:srgbClr val="FF0000"/>
+                </a:solidFill>
+              </a:rPr>
+              <a:t>quatro valores hexadecimais</a:t>
+            </a:r>
+            <a:r>
+              <a:rPr lang="pt-BR" sz="1700">
+                <a:solidFill>
+                  <a:srgbClr val="000000"/>
+                </a:solidFill>
+              </a:rPr>
+              <a:t>.</a:t>
+            </a:r>
+            <a:endParaRPr lang="pt-BR" sz="1700">
               <a:solidFill>
                 <a:srgbClr val="000000"/>
               </a:solidFill>
             </a:endParaRPr>
           </a:p>
           <a:p>
-            <a:pPr marL="342900" indent="-342900" algn="l" rtl="0">
+            <a:pPr marL="0" indent="0" algn="just" rtl="0">
               <a:buFont typeface="Arial" panose="020B0604020202020204" pitchFamily="34" charset="0"/>
-              <a:buChar char="•"/>
             </a:pPr>
             <a:r>
-              <a:rPr lang="pt-BR" sz="1600">
+              <a:rPr lang="pt-BR" sz="1700">
                 <a:solidFill>
                   <a:srgbClr val="000000"/>
                 </a:solidFill>
               </a:rPr>
-              <a:t>Cada grupo de caracteres hexadecimais de quatro é referido como um hextet.</a:t>
+              <a:t>Cada grupo de caracteres hexadecimais de quatro é referido como um </a:t>
             </a:r>
-            <a:endParaRPr lang="pt-BR" sz="1600">
+            <a:r>
+              <a:rPr lang="pt-BR" sz="1700" b="1">
+                <a:solidFill>
+                  <a:srgbClr val="FF0000"/>
+                </a:solidFill>
+              </a:rPr>
+              <a:t>hextet</a:t>
+            </a:r>
+            <a:r>
+              <a:rPr lang="pt-BR" sz="1700">
+                <a:solidFill>
+                  <a:srgbClr val="000000"/>
+                </a:solidFill>
+              </a:rPr>
+              <a:t>.</a:t>
+            </a:r>
+            <a:endParaRPr lang="pt-BR" sz="1700">
               <a:solidFill>
                 <a:srgbClr val="000000"/>
               </a:solidFill>
@@ -24138,7 +24410,7 @@
       </p:sp>
       <p:pic>
         <p:nvPicPr>
-          <p:cNvPr id="4" name="Picture 3"/>
+          <p:cNvPr id="2" name="Imagem 1"/>
           <p:cNvPicPr>
             <a:picLocks noChangeAspect="1"/>
           </p:cNvPicPr>
@@ -24146,14 +24418,15 @@
         </p:nvPicPr>
         <p:blipFill>
           <a:blip r:embed="rId1"/>
+          <a:srcRect l="22188" t="45391" r="22486" b="23801"/>
           <a:stretch>
             <a:fillRect/>
           </a:stretch>
         </p:blipFill>
         <p:spPr>
           <a:xfrm>
-            <a:off x="4088422" y="949381"/>
-            <a:ext cx="4859344" cy="3244738"/>
+            <a:off x="3450590" y="1017270"/>
+            <a:ext cx="5467350" cy="3298190"/>
           </a:xfrm>
           <a:prstGeom prst="rect">
             <a:avLst/>
@@ -24220,14 +24493,14 @@
             <a:pPr rtl="0"/>
             <a:r>
               <a:rPr lang="pt-BR" sz="1600"/>
-              <a:t>Sistema de numeração hexadecimal</a:t>
+              <a:t>Sistema de Numeração Hexadecimal</a:t>
             </a:r>
             <a:br>
               <a:rPr lang="en-US" dirty="0"/>
             </a:br>
             <a:r>
               <a:rPr lang="pt-BR" sz="2400"/>
-              <a:t>Conversões decimal para hexadecimal</a:t>
+              <a:t>Conversões Decimal para Hexadecimal</a:t>
             </a:r>
             <a:endParaRPr lang="pt-BR" sz="2400"/>
           </a:p>
@@ -24245,170 +24518,170 @@
         </p:nvSpPr>
         <p:spPr>
           <a:xfrm>
-            <a:off x="474662" y="850605"/>
-            <a:ext cx="8280057" cy="3571129"/>
+            <a:off x="186690" y="673100"/>
+            <a:ext cx="8759190" cy="3571240"/>
           </a:xfrm>
         </p:spPr>
         <p:txBody>
           <a:bodyPr/>
           <a:lstStyle/>
           <a:p>
-            <a:pPr algn="l" rtl="0"/>
+            <a:pPr algn="just" rtl="0"/>
             <a:r>
-              <a:rPr lang="pt-BR" sz="1600">
+              <a:rPr lang="pt-BR" sz="1850">
                 <a:solidFill>
                   <a:srgbClr val="000000"/>
                 </a:solidFill>
               </a:rPr>
               <a:t>Siga as etapas listadas para converter números decimais em valores hexadecimais:</a:t>
             </a:r>
-            <a:endParaRPr lang="pt-BR" sz="1600">
+            <a:endParaRPr lang="pt-BR" sz="1850">
               <a:solidFill>
                 <a:srgbClr val="000000"/>
               </a:solidFill>
             </a:endParaRPr>
           </a:p>
           <a:p>
-            <a:pPr marL="285750" indent="-285750" algn="l" rtl="0">
+            <a:pPr marL="285750" indent="-285750" algn="just" rtl="0">
               <a:buFont typeface="Arial" panose="020B0604020202020204" pitchFamily="34" charset="0"/>
               <a:buChar char="•"/>
             </a:pPr>
             <a:r>
-              <a:rPr lang="pt-BR" sz="1600">
+              <a:rPr lang="pt-BR" sz="1850">
                 <a:solidFill>
                   <a:srgbClr val="000000"/>
                 </a:solidFill>
               </a:rPr>
               <a:t>Converta o número decimal para strings binárias de 8 bits.</a:t>
             </a:r>
-            <a:endParaRPr lang="pt-BR" sz="1600">
+            <a:endParaRPr lang="pt-BR" sz="1850">
               <a:solidFill>
                 <a:srgbClr val="000000"/>
               </a:solidFill>
             </a:endParaRPr>
           </a:p>
           <a:p>
-            <a:pPr marL="285750" indent="-285750" algn="l" rtl="0">
+            <a:pPr marL="285750" indent="-285750" algn="just" rtl="0">
               <a:buFont typeface="Arial" panose="020B0604020202020204" pitchFamily="34" charset="0"/>
               <a:buChar char="•"/>
             </a:pPr>
             <a:r>
-              <a:rPr lang="pt-BR" sz="1600">
+              <a:rPr lang="pt-BR" sz="1850">
                 <a:solidFill>
                   <a:srgbClr val="000000"/>
                 </a:solidFill>
               </a:rPr>
               <a:t>Divida as cadeias binárias em grupos de quatro a partir da posição mais à direita.</a:t>
             </a:r>
-            <a:endParaRPr lang="pt-BR" sz="1600">
+            <a:endParaRPr lang="pt-BR" sz="1850">
               <a:solidFill>
                 <a:srgbClr val="000000"/>
               </a:solidFill>
             </a:endParaRPr>
           </a:p>
           <a:p>
-            <a:pPr marL="285750" indent="-285750" algn="l" rtl="0">
+            <a:pPr marL="285750" indent="-285750" algn="just" rtl="0">
               <a:buFont typeface="Arial" panose="020B0604020202020204" pitchFamily="34" charset="0"/>
               <a:buChar char="•"/>
             </a:pPr>
             <a:r>
-              <a:rPr lang="pt-BR" sz="1600">
+              <a:rPr lang="pt-BR" sz="1850">
                 <a:solidFill>
                   <a:srgbClr val="000000"/>
                 </a:solidFill>
               </a:rPr>
               <a:t>Converta cada quatro números binários em seu dígito hexadecimal equivalente.</a:t>
             </a:r>
-            <a:endParaRPr lang="pt-BR" sz="1600">
+            <a:endParaRPr lang="pt-BR" sz="1850">
               <a:solidFill>
                 <a:srgbClr val="000000"/>
               </a:solidFill>
             </a:endParaRPr>
           </a:p>
           <a:p>
-            <a:pPr algn="l"/>
-            <a:endParaRPr lang="en-US" sz="1600" dirty="0">
+            <a:pPr algn="just"/>
+            <a:endParaRPr lang="en-US" sz="1850" dirty="0">
               <a:solidFill>
                 <a:srgbClr val="000000"/>
               </a:solidFill>
             </a:endParaRPr>
           </a:p>
           <a:p>
-            <a:pPr algn="l" rtl="0"/>
+            <a:pPr algn="just" rtl="0"/>
             <a:r>
-              <a:rPr lang="pt-BR" sz="1600">
+              <a:rPr lang="pt-BR" sz="1850">
                 <a:solidFill>
                   <a:srgbClr val="000000"/>
                 </a:solidFill>
               </a:rPr>
               <a:t>Por exemplo, 168 convertidos em hexadecimal usando o processo de três etapas.</a:t>
             </a:r>
-            <a:endParaRPr lang="pt-BR" sz="1600">
+            <a:endParaRPr lang="pt-BR" sz="1850">
               <a:solidFill>
                 <a:srgbClr val="000000"/>
               </a:solidFill>
             </a:endParaRPr>
           </a:p>
           <a:p>
-            <a:pPr marL="285750" indent="-285750" algn="l" rtl="0">
+            <a:pPr marL="285750" indent="-285750" algn="just" rtl="0">
               <a:buFont typeface="Arial" panose="020B0604020202020204" pitchFamily="34" charset="0"/>
               <a:buChar char="•"/>
             </a:pPr>
             <a:r>
-              <a:rPr lang="pt-BR" sz="1600">
+              <a:rPr lang="pt-BR" sz="1850">
                 <a:solidFill>
                   <a:srgbClr val="000000"/>
                 </a:solidFill>
               </a:rPr>
               <a:t>168 em binário é 10101000.</a:t>
             </a:r>
-            <a:endParaRPr lang="pt-BR" sz="1600">
+            <a:endParaRPr lang="pt-BR" sz="1850">
               <a:solidFill>
                 <a:srgbClr val="000000"/>
               </a:solidFill>
             </a:endParaRPr>
           </a:p>
           <a:p>
-            <a:pPr marL="285750" indent="-285750" algn="l" rtl="0">
+            <a:pPr marL="285750" indent="-285750" algn="just" rtl="0">
               <a:buFont typeface="Arial" panose="020B0604020202020204" pitchFamily="34" charset="0"/>
               <a:buChar char="•"/>
             </a:pPr>
             <a:r>
-              <a:rPr lang="pt-BR" sz="1600">
+              <a:rPr lang="pt-BR" sz="1850">
                 <a:solidFill>
                   <a:srgbClr val="000000"/>
                 </a:solidFill>
               </a:rPr>
               <a:t>10101000 em dois grupos de quatro dígitos binários é 1010 e 1000.</a:t>
             </a:r>
-            <a:endParaRPr lang="pt-BR" sz="1600">
+            <a:endParaRPr lang="pt-BR" sz="1850">
               <a:solidFill>
                 <a:srgbClr val="000000"/>
               </a:solidFill>
             </a:endParaRPr>
           </a:p>
           <a:p>
-            <a:pPr marL="285750" indent="-285750" algn="l" rtl="0">
+            <a:pPr marL="285750" indent="-285750" algn="just" rtl="0">
               <a:buFont typeface="Arial" panose="020B0604020202020204" pitchFamily="34" charset="0"/>
               <a:buChar char="•"/>
             </a:pPr>
             <a:r>
-              <a:rPr lang="pt-BR" sz="1600">
+              <a:rPr lang="pt-BR" sz="1850">
                 <a:solidFill>
                   <a:srgbClr val="000000"/>
                 </a:solidFill>
               </a:rPr>
               <a:t>1010 é hexadecimal e 1000 é hexadecimal 8, então 168 é A8 em hexadecimal.</a:t>
             </a:r>
-            <a:endParaRPr lang="pt-BR" sz="1600">
+            <a:endParaRPr lang="pt-BR" sz="1850">
               <a:solidFill>
                 <a:srgbClr val="000000"/>
               </a:solidFill>
             </a:endParaRPr>
           </a:p>
           <a:p>
-            <a:pPr algn="l"/>
-            <a:endParaRPr lang="en-US" sz="1600" dirty="0">
+            <a:pPr algn="just"/>
+            <a:endParaRPr lang="en-US" sz="1850" dirty="0">
               <a:solidFill>
                 <a:srgbClr val="000000"/>
               </a:solidFill>
@@ -24476,14 +24749,14 @@
             <a:pPr rtl="0"/>
             <a:r>
               <a:rPr lang="pt-BR" sz="1600"/>
-              <a:t>Sistema de numeração hexadecimal</a:t>
+              <a:t>Sistema de Numeração Hexadecimal</a:t>
             </a:r>
             <a:br>
               <a:rPr lang="en-US" dirty="0"/>
             </a:br>
             <a:r>
               <a:rPr lang="pt-BR" sz="2400"/>
-              <a:t>Conversões hexadecimais em decimais</a:t>
+              <a:t>Conversões Hexadecimais em Decimais</a:t>
             </a:r>
             <a:endParaRPr lang="pt-BR" sz="2400"/>
           </a:p>
@@ -24501,162 +24774,162 @@
         </p:nvSpPr>
         <p:spPr>
           <a:xfrm>
-            <a:off x="474662" y="850605"/>
-            <a:ext cx="8280057" cy="3571129"/>
+            <a:off x="159385" y="763905"/>
+            <a:ext cx="8718550" cy="3571240"/>
           </a:xfrm>
         </p:spPr>
         <p:txBody>
           <a:bodyPr/>
           <a:lstStyle/>
           <a:p>
-            <a:pPr algn="l" rtl="0"/>
+            <a:pPr algn="just" rtl="0"/>
             <a:r>
-              <a:rPr lang="pt-BR" sz="1600">
+              <a:rPr lang="pt-BR" sz="1850">
                 <a:solidFill>
                   <a:srgbClr val="000000"/>
                 </a:solidFill>
               </a:rPr>
               <a:t>Siga as etapas listadas para converter números hexadecimais em valores decimais:</a:t>
             </a:r>
-            <a:endParaRPr lang="pt-BR" sz="1600">
+            <a:endParaRPr lang="pt-BR" sz="1850">
               <a:solidFill>
                 <a:srgbClr val="000000"/>
               </a:solidFill>
             </a:endParaRPr>
           </a:p>
           <a:p>
-            <a:pPr marL="342900" indent="-342900" algn="l" rtl="0">
+            <a:pPr marL="342900" indent="-342900" algn="just" rtl="0">
               <a:buFont typeface="Arial" panose="020B0604020202020204" pitchFamily="34" charset="0"/>
               <a:buChar char="•"/>
             </a:pPr>
             <a:r>
-              <a:rPr lang="pt-BR" sz="1600">
+              <a:rPr lang="pt-BR" sz="1850">
                 <a:solidFill>
                   <a:srgbClr val="000000"/>
                 </a:solidFill>
               </a:rPr>
               <a:t>Converta o número hexadecimal em cadeias binárias de 4 bits.</a:t>
             </a:r>
-            <a:endParaRPr lang="pt-BR" sz="1600">
+            <a:endParaRPr lang="pt-BR" sz="1850">
               <a:solidFill>
                 <a:srgbClr val="000000"/>
               </a:solidFill>
             </a:endParaRPr>
           </a:p>
           <a:p>
-            <a:pPr marL="342900" indent="-342900" algn="l" rtl="0">
+            <a:pPr marL="342900" indent="-342900" algn="just" rtl="0">
               <a:buFont typeface="Arial" panose="020B0604020202020204" pitchFamily="34" charset="0"/>
               <a:buChar char="•"/>
             </a:pPr>
             <a:r>
-              <a:rPr lang="pt-BR" sz="1600">
+              <a:rPr lang="pt-BR" sz="1850">
                 <a:solidFill>
                   <a:srgbClr val="000000"/>
                 </a:solidFill>
               </a:rPr>
               <a:t>Criar agrupamento binário de 8 bits a partir da posição mais à direita.</a:t>
             </a:r>
-            <a:endParaRPr lang="pt-BR" sz="1600">
+            <a:endParaRPr lang="pt-BR" sz="1850">
               <a:solidFill>
                 <a:srgbClr val="000000"/>
               </a:solidFill>
             </a:endParaRPr>
           </a:p>
           <a:p>
-            <a:pPr marL="342900" indent="-342900" algn="l" rtl="0">
+            <a:pPr marL="342900" indent="-342900" algn="just" rtl="0">
               <a:buFont typeface="Arial" panose="020B0604020202020204" pitchFamily="34" charset="0"/>
               <a:buChar char="•"/>
             </a:pPr>
             <a:r>
-              <a:rPr lang="pt-BR" sz="1600">
+              <a:rPr lang="pt-BR" sz="1850">
                 <a:solidFill>
                   <a:srgbClr val="000000"/>
                 </a:solidFill>
               </a:rPr>
               <a:t>Converta cada agrupamento binário de 8 bits em seu dígito decimal equivalente.</a:t>
             </a:r>
-            <a:endParaRPr lang="pt-BR" sz="1600">
+            <a:endParaRPr lang="pt-BR" sz="1850">
               <a:solidFill>
                 <a:srgbClr val="000000"/>
               </a:solidFill>
             </a:endParaRPr>
           </a:p>
           <a:p>
-            <a:pPr algn="l"/>
-            <a:endParaRPr lang="en-US" sz="1600" dirty="0">
+            <a:pPr algn="just"/>
+            <a:endParaRPr lang="en-US" sz="1850" dirty="0">
               <a:solidFill>
                 <a:srgbClr val="000000"/>
               </a:solidFill>
             </a:endParaRPr>
           </a:p>
           <a:p>
-            <a:pPr algn="l" rtl="0"/>
+            <a:pPr algn="just" rtl="0"/>
             <a:r>
-              <a:rPr lang="pt-BR" sz="1600">
+              <a:rPr lang="pt-BR" sz="1850">
                 <a:solidFill>
                   <a:srgbClr val="000000"/>
                 </a:solidFill>
               </a:rPr>
               <a:t>Por exemplo, D2 convertido em decimal usando o processo de três etapas:</a:t>
             </a:r>
-            <a:endParaRPr lang="pt-BR" sz="1600">
+            <a:endParaRPr lang="pt-BR" sz="1850">
               <a:solidFill>
                 <a:srgbClr val="000000"/>
               </a:solidFill>
             </a:endParaRPr>
           </a:p>
           <a:p>
-            <a:pPr marL="342900" indent="-342900" algn="l" rtl="0">
+            <a:pPr marL="342900" indent="-342900" algn="just" rtl="0">
               <a:buFont typeface="Arial" panose="020B0604020202020204" pitchFamily="34" charset="0"/>
               <a:buChar char="•"/>
             </a:pPr>
             <a:r>
-              <a:rPr lang="pt-BR" sz="1600">
+              <a:rPr lang="pt-BR" sz="1850">
                 <a:solidFill>
                   <a:srgbClr val="000000"/>
                 </a:solidFill>
               </a:rPr>
               <a:t>D2 em cadeias binárias de 4 bits é 1110 e 0010.</a:t>
             </a:r>
-            <a:endParaRPr lang="pt-BR" sz="1600">
+            <a:endParaRPr lang="pt-BR" sz="1850">
               <a:solidFill>
                 <a:srgbClr val="000000"/>
               </a:solidFill>
             </a:endParaRPr>
           </a:p>
           <a:p>
-            <a:pPr marL="342900" indent="-342900" algn="l" rtl="0">
+            <a:pPr marL="342900" indent="-342900" algn="just" rtl="0">
               <a:buFont typeface="Arial" panose="020B0604020202020204" pitchFamily="34" charset="0"/>
               <a:buChar char="•"/>
             </a:pPr>
             <a:r>
-              <a:rPr lang="pt-BR" sz="1600">
+              <a:rPr lang="pt-BR" sz="1850">
                 <a:solidFill>
                   <a:srgbClr val="000000"/>
                 </a:solidFill>
               </a:rPr>
               <a:t>1110 e 0010 é 11100010 em um agrupamento de 8 bits.</a:t>
             </a:r>
-            <a:endParaRPr lang="pt-BR" sz="1600">
+            <a:endParaRPr lang="pt-BR" sz="1850">
               <a:solidFill>
                 <a:srgbClr val="000000"/>
               </a:solidFill>
             </a:endParaRPr>
           </a:p>
           <a:p>
-            <a:pPr marL="342900" indent="-342900" algn="l" rtl="0">
+            <a:pPr marL="342900" indent="-342900" algn="just" rtl="0">
               <a:buFont typeface="Arial" panose="020B0604020202020204" pitchFamily="34" charset="0"/>
               <a:buChar char="•"/>
             </a:pPr>
             <a:r>
-              <a:rPr lang="pt-BR" sz="1600">
+              <a:rPr lang="pt-BR" sz="1850">
                 <a:solidFill>
                   <a:srgbClr val="000000"/>
                 </a:solidFill>
               </a:rPr>
               <a:t>11100010 em binário é equivalente a 210 em decimal, então D2 é 210 é decimal</a:t>
             </a:r>
-            <a:endParaRPr lang="pt-BR" sz="1600">
+            <a:endParaRPr lang="pt-BR" sz="1850">
               <a:solidFill>
                 <a:srgbClr val="000000"/>
               </a:solidFill>
@@ -25651,7 +25924,7 @@
                       <a:pPr algn="ctr" rtl="0"/>
                       <a:r>
                         <a:rPr lang="pt-BR" sz="1400"/>
-                        <a:t>Cáculo</a:t>
+                        <a:t>Cálculo</a:t>
                       </a:r>
                       <a:endParaRPr lang="pt-BR" sz="1400"/>
                     </a:p>
@@ -26431,14 +26704,30 @@
           <a:p>
             <a:pPr marL="0" indent="0" algn="ctr" rtl="0"/>
             <a:r>
-              <a:rPr lang="pt-BR" sz="1900">
+              <a:rPr lang="pt-BR" sz="1800">
                 <a:solidFill>
                   <a:srgbClr val="000000"/>
                 </a:solidFill>
               </a:rPr>
-              <a:t>O sistema de notação posicional binária opera como mostrado nas tabelas abaixo.</a:t>
+              <a:t>O sistema de </a:t>
             </a:r>
-            <a:endParaRPr lang="pt-BR" sz="1900">
+            <a:r>
+              <a:rPr lang="pt-BR" sz="1800" b="1">
+                <a:solidFill>
+                  <a:srgbClr val="FF0000"/>
+                </a:solidFill>
+              </a:rPr>
+              <a:t>notação posicional binária</a:t>
+            </a:r>
+            <a:r>
+              <a:rPr lang="pt-BR" sz="1800">
+                <a:solidFill>
+                  <a:srgbClr val="000000"/>
+                </a:solidFill>
+              </a:rPr>
+              <a:t> opera como mostrado nas tabelas abaixo.</a:t>
+            </a:r>
+            <a:endParaRPr lang="pt-BR" sz="1800">
               <a:solidFill>
                 <a:srgbClr val="000000"/>
               </a:solidFill>
@@ -26758,7 +27047,7 @@
                       <a:pPr algn="ctr" rtl="0"/>
                       <a:r>
                         <a:rPr lang="pt-BR" sz="1500" b="1"/>
-                        <a:t>Cáculo</a:t>
+                        <a:t>Cálculo</a:t>
                       </a:r>
                       <a:endParaRPr lang="pt-BR" sz="1500" b="1"/>
                     </a:p>
@@ -27450,7 +27739,7 @@
                       <a:pPr algn="ctr" rtl="0"/>
                       <a:r>
                         <a:rPr lang="pt-BR" sz="1500" b="1"/>
-                        <a:t>Cáculo</a:t>
+                        <a:t>Cálculo</a:t>
                       </a:r>
                       <a:endParaRPr lang="pt-BR" sz="1500" b="1"/>
                     </a:p>
@@ -27841,7 +28130,7 @@
             </a:br>
             <a:r>
               <a:rPr lang="pt-BR" sz="2400"/>
-              <a:t>Conterter Binário para Decimal</a:t>
+              <a:t>Converter Binário para Decimal</a:t>
             </a:r>
             <a:endParaRPr lang="pt-BR" sz="2400"/>
           </a:p>
@@ -27855,8 +28144,8 @@
         </p:nvSpPr>
         <p:spPr>
           <a:xfrm>
-            <a:off x="79375" y="635000"/>
-            <a:ext cx="8985885" cy="306705"/>
+            <a:off x="79375" y="554990"/>
+            <a:ext cx="8985885" cy="398780"/>
           </a:xfrm>
           <a:prstGeom prst="rect">
             <a:avLst/>
@@ -27871,18 +28160,22 @@
           <a:p>
             <a:pPr algn="ctr" rtl="0"/>
             <a:r>
-              <a:rPr lang="pt-BR" sz="1400"/>
+              <a:rPr lang="pt-BR" sz="2000"/>
               <a:t>Converter: </a:t>
             </a:r>
             <a:r>
-              <a:rPr lang="pt-BR" sz="1400" b="1"/>
+              <a:rPr lang="pt-BR" sz="2000" b="1">
+                <a:solidFill>
+                  <a:srgbClr val="FF0000"/>
+                </a:solidFill>
+              </a:rPr>
               <a:t>11000000.10101000.00001011.00001010</a:t>
             </a:r>
             <a:r>
-              <a:rPr lang="pt-BR" sz="1400"/>
+              <a:rPr lang="pt-BR" sz="2000"/>
               <a:t> para decimais.</a:t>
             </a:r>
-            <a:endParaRPr lang="pt-BR" sz="1400"/>
+            <a:endParaRPr lang="pt-BR" sz="2000"/>
           </a:p>
         </p:txBody>
       </p:sp>
@@ -28198,7 +28491,7 @@
                       <a:pPr algn="ctr" rtl="0"/>
                       <a:r>
                         <a:rPr lang="pt-BR" sz="1100"/>
-                        <a:t>Cáculo</a:t>
+                        <a:t>Cálculo</a:t>
                       </a:r>
                       <a:endParaRPr lang="pt-BR" sz="1100"/>
                     </a:p>
@@ -28609,7 +28902,7 @@
                       <a:pPr algn="ctr" rtl="0"/>
                       <a:r>
                         <a:rPr lang="pt-BR" sz="1100"/>
-                        <a:t>Cáculo</a:t>
+                        <a:t>Cálculo</a:t>
                       </a:r>
                       <a:endParaRPr lang="pt-BR" sz="1100"/>
                     </a:p>
@@ -29431,7 +29724,7 @@
                       <a:pPr algn="ctr" rtl="0"/>
                       <a:r>
                         <a:rPr lang="pt-BR" sz="1100"/>
-                        <a:t>Cáculo</a:t>
+                        <a:t>Cálculo</a:t>
                       </a:r>
                       <a:endParaRPr lang="pt-BR" sz="1100"/>
                     </a:p>
@@ -30112,7 +30405,7 @@
             </a:br>
             <a:r>
               <a:rPr lang="pt-BR" sz="2400"/>
-              <a:t>Conterter Binário para Decimal</a:t>
+              <a:t>Converter Binário para Decimal</a:t>
             </a:r>
             <a:endParaRPr lang="pt-BR" sz="2400"/>
           </a:p>
@@ -30130,15 +30423,15 @@
         </p:nvSpPr>
         <p:spPr>
           <a:xfrm>
-            <a:off x="358285" y="753957"/>
-            <a:ext cx="8169608" cy="613657"/>
+            <a:off x="100965" y="659130"/>
+            <a:ext cx="8909685" cy="613410"/>
           </a:xfrm>
         </p:spPr>
         <p:txBody>
           <a:bodyPr/>
           <a:lstStyle/>
           <a:p>
-            <a:pPr marL="0" indent="0" algn="l" rtl="0"/>
+            <a:pPr marL="0" indent="0" algn="ctr" rtl="0"/>
             <a:r>
               <a:rPr lang="pt-BR" sz="1600">
                 <a:solidFill>
@@ -30163,8 +30456,8 @@
         </p:nvSpPr>
         <p:spPr>
           <a:xfrm>
-            <a:off x="499729" y="1453629"/>
-            <a:ext cx="3831202" cy="2893100"/>
+            <a:off x="100330" y="1075690"/>
+            <a:ext cx="3162935" cy="3553460"/>
           </a:xfrm>
           <a:prstGeom prst="rect">
             <a:avLst/>
@@ -30177,76 +30470,204 @@
           </a:bodyPr>
           <a:lstStyle/>
           <a:p>
-            <a:pPr marL="431800" lvl="2" indent="-285750" rtl="0">
+            <a:pPr marL="431800" lvl="2" indent="-285750" algn="just" rtl="0">
               <a:buFont typeface="Arial" panose="020B0604020202020204" pitchFamily="34" charset="0"/>
               <a:buChar char="•"/>
             </a:pPr>
             <a:r>
-              <a:rPr lang="pt-BR" sz="1400">
+              <a:rPr lang="pt-BR" sz="1500">
                 <a:solidFill>
                   <a:srgbClr val="000000"/>
                 </a:solidFill>
               </a:rPr>
-              <a:t>Comece na posição 128 (o bit mais significativo). O número decimal do octeto (n) é igual ou superior a 128?</a:t>
+              <a:t>Comece na </a:t>
             </a:r>
-            <a:endParaRPr lang="pt-BR" sz="1400">
+            <a:r>
+              <a:rPr lang="pt-BR" sz="1500" b="1">
+                <a:solidFill>
+                  <a:srgbClr val="FF0000"/>
+                </a:solidFill>
+              </a:rPr>
+              <a:t>posição 128</a:t>
+            </a:r>
+            <a:r>
+              <a:rPr lang="pt-BR" sz="1500">
+                <a:solidFill>
+                  <a:srgbClr val="000000"/>
+                </a:solidFill>
+              </a:rPr>
+              <a:t> (o bit mais significativo). O número decimal do octeto (n) é igual ou superior a 128?</a:t>
+            </a:r>
+            <a:endParaRPr lang="pt-BR" sz="1500">
               <a:solidFill>
                 <a:srgbClr val="000000"/>
               </a:solidFill>
             </a:endParaRPr>
           </a:p>
           <a:p>
-            <a:pPr marL="431800" lvl="2" indent="-285750" rtl="0">
+            <a:pPr marL="431800" lvl="2" indent="-285750" algn="just" rtl="0">
               <a:buFont typeface="Arial" panose="020B0604020202020204" pitchFamily="34" charset="0"/>
               <a:buChar char="•"/>
             </a:pPr>
             <a:r>
-              <a:rPr lang="pt-BR" sz="1400">
+              <a:rPr lang="pt-BR" sz="1500">
                 <a:solidFill>
                   <a:srgbClr val="000000"/>
                 </a:solidFill>
               </a:rPr>
-              <a:t>Se não, registre um binário 0 no valor posicional 128 e mova para o valor posicional 64.</a:t>
+              <a:t>Se não, registre um </a:t>
             </a:r>
-            <a:endParaRPr lang="pt-BR" sz="1400">
+            <a:r>
+              <a:rPr lang="pt-BR" sz="1500" b="1">
+                <a:solidFill>
+                  <a:srgbClr val="FF0000"/>
+                </a:solidFill>
+              </a:rPr>
+              <a:t>binário 0</a:t>
+            </a:r>
+            <a:r>
+              <a:rPr lang="pt-BR" sz="1500" b="1">
+                <a:solidFill>
+                  <a:srgbClr val="000000"/>
+                </a:solidFill>
+              </a:rPr>
+              <a:t> </a:t>
+            </a:r>
+            <a:r>
+              <a:rPr lang="pt-BR" sz="1500">
+                <a:solidFill>
+                  <a:srgbClr val="000000"/>
+                </a:solidFill>
+              </a:rPr>
+              <a:t>no valor </a:t>
+            </a:r>
+            <a:r>
+              <a:rPr lang="pt-BR" sz="1500" b="1">
+                <a:solidFill>
+                  <a:srgbClr val="FF0000"/>
+                </a:solidFill>
+              </a:rPr>
+              <a:t>posicional 128</a:t>
+            </a:r>
+            <a:r>
+              <a:rPr lang="pt-BR" sz="1500">
+                <a:solidFill>
+                  <a:srgbClr val="000000"/>
+                </a:solidFill>
+              </a:rPr>
+              <a:t> e mova para o valor </a:t>
+            </a:r>
+            <a:r>
+              <a:rPr lang="pt-BR" sz="1500" b="1">
+                <a:solidFill>
+                  <a:srgbClr val="FF0000"/>
+                </a:solidFill>
+              </a:rPr>
+              <a:t>posicional 64</a:t>
+            </a:r>
+            <a:r>
+              <a:rPr lang="pt-BR" sz="1500">
+                <a:solidFill>
+                  <a:srgbClr val="000000"/>
+                </a:solidFill>
+              </a:rPr>
+              <a:t>.</a:t>
+            </a:r>
+            <a:endParaRPr lang="pt-BR" sz="1500">
               <a:solidFill>
                 <a:srgbClr val="000000"/>
               </a:solidFill>
             </a:endParaRPr>
           </a:p>
           <a:p>
-            <a:pPr marL="431800" lvl="2" indent="-285750" rtl="0">
+            <a:pPr marL="431800" lvl="2" indent="-285750" algn="just" rtl="0">
               <a:buFont typeface="Arial" panose="020B0604020202020204" pitchFamily="34" charset="0"/>
               <a:buChar char="•"/>
             </a:pPr>
             <a:r>
-              <a:rPr lang="pt-BR" sz="1400">
+              <a:rPr lang="pt-BR" sz="1500">
                 <a:solidFill>
                   <a:srgbClr val="000000"/>
                 </a:solidFill>
               </a:rPr>
-              <a:t>Se sim, registre um 1 binário no valor posicional 128, subtraia 128 do número decimal e vá para o valor posicional 64.</a:t>
+              <a:t>Se sim, registre um </a:t>
             </a:r>
-            <a:endParaRPr lang="pt-BR" sz="1400">
+            <a:r>
+              <a:rPr lang="pt-BR" sz="1500" b="1">
+                <a:solidFill>
+                  <a:srgbClr val="FF0000"/>
+                </a:solidFill>
+              </a:rPr>
+              <a:t>1 binário</a:t>
+            </a:r>
+            <a:r>
+              <a:rPr lang="pt-BR" sz="1500" b="1">
+                <a:solidFill>
+                  <a:srgbClr val="000000"/>
+                </a:solidFill>
+              </a:rPr>
+              <a:t> </a:t>
+            </a:r>
+            <a:r>
+              <a:rPr lang="pt-BR" sz="1500">
+                <a:solidFill>
+                  <a:srgbClr val="000000"/>
+                </a:solidFill>
+              </a:rPr>
+              <a:t>no valor </a:t>
+            </a:r>
+            <a:r>
+              <a:rPr lang="pt-BR" sz="1500" b="1">
+                <a:solidFill>
+                  <a:srgbClr val="FF0000"/>
+                </a:solidFill>
+              </a:rPr>
+              <a:t>posicional 128</a:t>
+            </a:r>
+            <a:r>
+              <a:rPr lang="pt-BR" sz="1500">
+                <a:solidFill>
+                  <a:srgbClr val="000000"/>
+                </a:solidFill>
+              </a:rPr>
+              <a:t>, subtraia 128 do número decimal e vá para o valor </a:t>
+            </a:r>
+            <a:r>
+              <a:rPr lang="pt-BR" sz="1500" b="1">
+                <a:solidFill>
+                  <a:srgbClr val="FF0000"/>
+                </a:solidFill>
+              </a:rPr>
+              <a:t>posicional 64</a:t>
+            </a:r>
+            <a:r>
+              <a:rPr lang="pt-BR" sz="1500">
+                <a:solidFill>
+                  <a:srgbClr val="000000"/>
+                </a:solidFill>
+              </a:rPr>
+              <a:t>.</a:t>
+            </a:r>
+            <a:endParaRPr lang="pt-BR" sz="1500">
               <a:solidFill>
                 <a:srgbClr val="000000"/>
               </a:solidFill>
             </a:endParaRPr>
           </a:p>
           <a:p>
-            <a:pPr marL="431800" lvl="2" indent="-285750" rtl="0">
+            <a:pPr marL="431800" lvl="2" indent="-285750" algn="just" rtl="0">
               <a:buFont typeface="Arial" panose="020B0604020202020204" pitchFamily="34" charset="0"/>
               <a:buChar char="•"/>
             </a:pPr>
             <a:r>
-              <a:rPr lang="pt-BR" sz="1400">
+              <a:rPr lang="pt-BR" sz="1500">
                 <a:solidFill>
                   <a:srgbClr val="000000"/>
                 </a:solidFill>
               </a:rPr>
               <a:t>Repita estas etapas através do valor posicional 1.</a:t>
             </a:r>
-            <a:endParaRPr lang="pt-BR" sz="1400">
+            <a:endParaRPr lang="pt-BR" sz="1500">
               <a:solidFill>
                 <a:srgbClr val="000000"/>
               </a:solidFill>
@@ -30256,22 +30677,37 @@
       </p:sp>
       <p:pic>
         <p:nvPicPr>
-          <p:cNvPr id="10" name="Picture 9"/>
+          <p:cNvPr id="2" name="Imagem 1"/>
           <p:cNvPicPr>
             <a:picLocks noChangeAspect="1"/>
           </p:cNvPicPr>
           <p:nvPr/>
         </p:nvPicPr>
         <p:blipFill>
-          <a:blip r:embed="rId1"/>
+          <a:blip r:embed="rId1">
+            <a:clrChange>
+              <a:clrFrom>
+                <a:srgbClr val="FFFFFF">
+                  <a:alpha val="100000"/>
+                </a:srgbClr>
+              </a:clrFrom>
+              <a:clrTo>
+                <a:srgbClr val="FFFFFF">
+                  <a:alpha val="100000"/>
+                  <a:alpha val="0"/>
+                </a:srgbClr>
+              </a:clrTo>
+            </a:clrChange>
+          </a:blip>
+          <a:srcRect l="20243" t="53276" r="19194" b="16474"/>
           <a:stretch>
             <a:fillRect/>
           </a:stretch>
         </p:blipFill>
         <p:spPr>
           <a:xfrm>
-            <a:off x="4330930" y="1383647"/>
-            <a:ext cx="4680513" cy="2806700"/>
+            <a:off x="3270250" y="1299210"/>
+            <a:ext cx="5740400" cy="3106420"/>
           </a:xfrm>
           <a:prstGeom prst="rect">
             <a:avLst/>
@@ -30365,27 +30801,42 @@
         </p:nvSpPr>
         <p:spPr>
           <a:xfrm>
-            <a:off x="474661" y="786907"/>
-            <a:ext cx="8280057" cy="448354"/>
+            <a:off x="66040" y="657225"/>
+            <a:ext cx="8950960" cy="448310"/>
           </a:xfrm>
         </p:spPr>
         <p:txBody>
           <a:bodyPr/>
           <a:lstStyle/>
           <a:p>
-            <a:pPr marL="342900" indent="-342900" algn="l" rtl="0">
+            <a:pPr marL="0" indent="0" algn="ctr" rtl="0">
               <a:buFont typeface="Arial" panose="020B0604020202020204" pitchFamily="34" charset="0"/>
-              <a:buChar char="•"/>
             </a:pPr>
             <a:r>
-              <a:rPr lang="pt-BR">
+              <a:rPr lang="pt-BR" sz="2500">
                 <a:solidFill>
                   <a:srgbClr val="000000"/>
                 </a:solidFill>
               </a:rPr>
-              <a:t>Converter decimal 168 em binário</a:t>
+              <a:t>Converter decimal </a:t>
             </a:r>
-            <a:endParaRPr lang="pt-BR">
+            <a:r>
+              <a:rPr lang="pt-BR" sz="2500" b="1">
+                <a:solidFill>
+                  <a:srgbClr val="FF0000"/>
+                </a:solidFill>
+              </a:rPr>
+              <a:t>192 </a:t>
+            </a:r>
+            <a:r>
+              <a:rPr lang="pt-BR" sz="2500">
+                <a:solidFill>
+                  <a:srgbClr val="000000"/>
+                </a:solidFill>
+              </a:rPr>
+              <a:t>em binário</a:t>
+            </a:r>
+            <a:endParaRPr lang="pt-BR" sz="2500">
               <a:solidFill>
                 <a:srgbClr val="000000"/>
               </a:solidFill>
@@ -30393,527 +30844,45 @@
           </a:p>
         </p:txBody>
       </p:sp>
-      <p:sp>
-        <p:nvSpPr>
-          <p:cNvPr id="7" name="TextBox 6"/>
-          <p:cNvSpPr txBox="1"/>
+      <p:pic>
+        <p:nvPicPr>
+          <p:cNvPr id="2" name="Imagem 1"/>
+          <p:cNvPicPr>
+            <a:picLocks noChangeAspect="1"/>
+          </p:cNvPicPr>
           <p:nvPr/>
-        </p:nvSpPr>
+        </p:nvPicPr>
+        <p:blipFill>
+          <a:blip r:embed="rId1">
+            <a:clrChange>
+              <a:clrFrom>
+                <a:srgbClr val="FFFFFF">
+                  <a:alpha val="100000"/>
+                </a:srgbClr>
+              </a:clrFrom>
+              <a:clrTo>
+                <a:srgbClr val="FFFFFF">
+                  <a:alpha val="100000"/>
+                  <a:alpha val="0"/>
+                </a:srgbClr>
+              </a:clrTo>
+            </a:clrChange>
+          </a:blip>
+          <a:srcRect l="20694" t="46083" r="34632" b="34462"/>
+          <a:stretch>
+            <a:fillRect/>
+          </a:stretch>
+        </p:blipFill>
         <p:spPr>
           <a:xfrm>
-            <a:off x="1720182" y="1235260"/>
-            <a:ext cx="5134291" cy="2462213"/>
+            <a:off x="66040" y="1105535"/>
+            <a:ext cx="8950325" cy="3498850"/>
           </a:xfrm>
           <a:prstGeom prst="rect">
             <a:avLst/>
           </a:prstGeom>
-          <a:noFill/>
         </p:spPr>
-        <p:txBody>
-          <a:bodyPr wrap="none" rtlCol="0">
-            <a:spAutoFit/>
-          </a:bodyPr>
-          <a:lstStyle/>
-          <a:p>
-            <a:pPr rtl="0"/>
-            <a:r>
-              <a:rPr lang="pt-BR" sz="1400">
-                <a:solidFill>
-                  <a:srgbClr val="000000"/>
-                </a:solidFill>
-              </a:rPr>
-              <a:t>168 é &gt; 128?</a:t>
-            </a:r>
-            <a:endParaRPr lang="pt-BR" sz="1400">
-              <a:solidFill>
-                <a:srgbClr val="000000"/>
-              </a:solidFill>
-            </a:endParaRPr>
-          </a:p>
-          <a:p>
-            <a:pPr marL="285750" indent="-285750" rtl="0">
-              <a:buFontTx/>
-              <a:buChar char="-"/>
-            </a:pPr>
-            <a:r>
-              <a:rPr lang="pt-BR" sz="1400">
-                <a:solidFill>
-                  <a:srgbClr val="000000"/>
-                </a:solidFill>
-              </a:rPr>
-              <a:t>Sim, digite 1 na posição 128 e subtraia 128 (168-128=40)</a:t>
-            </a:r>
-            <a:endParaRPr lang="pt-BR" sz="1400">
-              <a:solidFill>
-                <a:srgbClr val="000000"/>
-              </a:solidFill>
-            </a:endParaRPr>
-          </a:p>
-          <a:p>
-            <a:pPr rtl="0"/>
-            <a:r>
-              <a:rPr lang="pt-BR" sz="1400">
-                <a:solidFill>
-                  <a:srgbClr val="000000"/>
-                </a:solidFill>
-              </a:rPr>
-              <a:t>40 é &gt;= 64?</a:t>
-            </a:r>
-            <a:endParaRPr lang="pt-BR" sz="1400">
-              <a:solidFill>
-                <a:srgbClr val="000000"/>
-              </a:solidFill>
-            </a:endParaRPr>
-          </a:p>
-          <a:p>
-            <a:pPr marL="285750" indent="-285750" rtl="0">
-              <a:buFontTx/>
-              <a:buChar char="-"/>
-            </a:pPr>
-            <a:r>
-              <a:rPr lang="pt-BR" sz="1400">
-                <a:solidFill>
-                  <a:srgbClr val="000000"/>
-                </a:solidFill>
-              </a:rPr>
-              <a:t>Não, digite 0 na posição 64 e siga em frente</a:t>
-            </a:r>
-            <a:endParaRPr lang="pt-BR" sz="1400">
-              <a:solidFill>
-                <a:srgbClr val="000000"/>
-              </a:solidFill>
-            </a:endParaRPr>
-          </a:p>
-          <a:p>
-            <a:pPr rtl="0"/>
-            <a:r>
-              <a:rPr lang="pt-BR" sz="1400">
-                <a:solidFill>
-                  <a:srgbClr val="000000"/>
-                </a:solidFill>
-              </a:rPr>
-              <a:t>É 40 &gt; 32?</a:t>
-            </a:r>
-            <a:endParaRPr lang="pt-BR" sz="1400">
-              <a:solidFill>
-                <a:srgbClr val="000000"/>
-              </a:solidFill>
-            </a:endParaRPr>
-          </a:p>
-          <a:p>
-            <a:pPr marL="285750" indent="-285750" rtl="0">
-              <a:buFontTx/>
-              <a:buChar char="-"/>
-            </a:pPr>
-            <a:r>
-              <a:rPr lang="pt-BR" sz="1400">
-                <a:solidFill>
-                  <a:srgbClr val="000000"/>
-                </a:solidFill>
-              </a:rPr>
-              <a:t>Sim, digite 1 na posição 32 e subtraia 32 (40-32=8)</a:t>
-            </a:r>
-            <a:endParaRPr lang="pt-BR" sz="1400">
-              <a:solidFill>
-                <a:srgbClr val="000000"/>
-              </a:solidFill>
-            </a:endParaRPr>
-          </a:p>
-          <a:p>
-            <a:pPr rtl="0"/>
-            <a:r>
-              <a:rPr lang="pt-BR" sz="1400">
-                <a:solidFill>
-                  <a:srgbClr val="000000"/>
-                </a:solidFill>
-              </a:rPr>
-              <a:t>É 8 &gt; 16?</a:t>
-            </a:r>
-            <a:endParaRPr lang="pt-BR" sz="1400">
-              <a:solidFill>
-                <a:srgbClr val="000000"/>
-              </a:solidFill>
-            </a:endParaRPr>
-          </a:p>
-          <a:p>
-            <a:pPr marL="285750" indent="-285750" rtl="0">
-              <a:buFontTx/>
-              <a:buChar char="-"/>
-            </a:pPr>
-            <a:r>
-              <a:rPr lang="pt-BR" sz="1400">
-                <a:solidFill>
-                  <a:srgbClr val="000000"/>
-                </a:solidFill>
-              </a:rPr>
-              <a:t>Não, digite 0 na posição 16 e siga em frente</a:t>
-            </a:r>
-            <a:endParaRPr lang="pt-BR" sz="1400">
-              <a:solidFill>
-                <a:srgbClr val="000000"/>
-              </a:solidFill>
-            </a:endParaRPr>
-          </a:p>
-          <a:p>
-            <a:pPr rtl="0"/>
-            <a:r>
-              <a:rPr lang="pt-BR" sz="1400">
-                <a:solidFill>
-                  <a:srgbClr val="000000"/>
-                </a:solidFill>
-              </a:rPr>
-              <a:t>8 é &gt; 8?</a:t>
-            </a:r>
-            <a:endParaRPr lang="pt-BR" sz="1400">
-              <a:solidFill>
-                <a:srgbClr val="000000"/>
-              </a:solidFill>
-            </a:endParaRPr>
-          </a:p>
-          <a:p>
-            <a:pPr marL="285750" indent="-285750" rtl="0">
-              <a:buFontTx/>
-              <a:buChar char="-"/>
-            </a:pPr>
-            <a:r>
-              <a:rPr lang="pt-BR" sz="1400">
-                <a:solidFill>
-                  <a:srgbClr val="000000"/>
-                </a:solidFill>
-              </a:rPr>
-              <a:t>Igual Digite 1 na posição 8 e subtraia 8 (8-8=0)</a:t>
-            </a:r>
-            <a:endParaRPr lang="pt-BR" sz="1400">
-              <a:solidFill>
-                <a:srgbClr val="000000"/>
-              </a:solidFill>
-            </a:endParaRPr>
-          </a:p>
-          <a:p>
-            <a:pPr rtl="0"/>
-            <a:r>
-              <a:rPr lang="pt-BR" sz="1400">
-                <a:solidFill>
-                  <a:srgbClr val="000000"/>
-                </a:solidFill>
-              </a:rPr>
-              <a:t>Nenhum valor restante. Insira 0 nas posições binárias restantes</a:t>
-            </a:r>
-            <a:endParaRPr lang="pt-BR" sz="1400">
-              <a:solidFill>
-                <a:srgbClr val="000000"/>
-              </a:solidFill>
-            </a:endParaRPr>
-          </a:p>
-        </p:txBody>
-      </p:sp>
-      <p:graphicFrame>
-        <p:nvGraphicFramePr>
-          <p:cNvPr id="6" name="Table 5"/>
-          <p:cNvGraphicFramePr>
-            <a:graphicFrameLocks noGrp="1"/>
-          </p:cNvGraphicFramePr>
-          <p:nvPr/>
-        </p:nvGraphicFramePr>
-        <p:xfrm>
-          <a:off x="1524000" y="3720643"/>
-          <a:ext cx="6096000" cy="741680"/>
-        </p:xfrm>
-        <a:graphic>
-          <a:graphicData uri="http://schemas.openxmlformats.org/drawingml/2006/table">
-            <a:tbl>
-              <a:tblPr firstRow="1" bandRow="1">
-                <a:tableStyleId>{5C22544A-7EE6-4342-B048-85BDC9FD1C3A}</a:tableStyleId>
-              </a:tblPr>
-              <a:tblGrid>
-                <a:gridCol w="762000"/>
-                <a:gridCol w="762000"/>
-                <a:gridCol w="762000"/>
-                <a:gridCol w="762000"/>
-                <a:gridCol w="762000"/>
-                <a:gridCol w="762000"/>
-                <a:gridCol w="762000"/>
-                <a:gridCol w="762000"/>
-              </a:tblGrid>
-              <a:tr h="370840">
-                <a:tc>
-                  <a:txBody>
-                    <a:bodyPr/>
-                    <a:lstStyle/>
-                    <a:p>
-                      <a:pPr algn="ctr" rtl="0"/>
-                      <a:r>
-                        <a:rPr lang="pt-BR"/>
-                        <a:t>128</a:t>
-                      </a:r>
-                      <a:endParaRPr lang="pt-BR"/>
-                    </a:p>
-                  </a:txBody>
-                  <a:tcPr/>
-                </a:tc>
-                <a:tc>
-                  <a:txBody>
-                    <a:bodyPr/>
-                    <a:lstStyle/>
-                    <a:p>
-                      <a:pPr algn="ctr" rtl="0"/>
-                      <a:r>
-                        <a:rPr lang="pt-BR"/>
-                        <a:t>64</a:t>
-                      </a:r>
-                      <a:endParaRPr lang="pt-BR"/>
-                    </a:p>
-                  </a:txBody>
-                  <a:tcPr/>
-                </a:tc>
-                <a:tc>
-                  <a:txBody>
-                    <a:bodyPr/>
-                    <a:lstStyle/>
-                    <a:p>
-                      <a:pPr algn="ctr" rtl="0"/>
-                      <a:r>
-                        <a:rPr lang="pt-BR"/>
-                        <a:t>32</a:t>
-                      </a:r>
-                      <a:endParaRPr lang="pt-BR"/>
-                    </a:p>
-                  </a:txBody>
-                  <a:tcPr/>
-                </a:tc>
-                <a:tc>
-                  <a:txBody>
-                    <a:bodyPr/>
-                    <a:lstStyle/>
-                    <a:p>
-                      <a:pPr algn="ctr" rtl="0"/>
-                      <a:r>
-                        <a:rPr lang="pt-BR"/>
-                        <a:t>16</a:t>
-                      </a:r>
-                      <a:endParaRPr lang="pt-BR"/>
-                    </a:p>
-                  </a:txBody>
-                  <a:tcPr/>
-                </a:tc>
-                <a:tc>
-                  <a:txBody>
-                    <a:bodyPr/>
-                    <a:lstStyle/>
-                    <a:p>
-                      <a:pPr algn="ctr" rtl="0"/>
-                      <a:r>
-                        <a:rPr lang="pt-BR"/>
-                        <a:t>8</a:t>
-                      </a:r>
-                      <a:endParaRPr lang="pt-BR"/>
-                    </a:p>
-                  </a:txBody>
-                  <a:tcPr/>
-                </a:tc>
-                <a:tc>
-                  <a:txBody>
-                    <a:bodyPr/>
-                    <a:lstStyle/>
-                    <a:p>
-                      <a:pPr algn="ctr" rtl="0"/>
-                      <a:r>
-                        <a:rPr lang="pt-BR"/>
-                        <a:t>4</a:t>
-                      </a:r>
-                      <a:endParaRPr lang="pt-BR"/>
-                    </a:p>
-                  </a:txBody>
-                  <a:tcPr/>
-                </a:tc>
-                <a:tc>
-                  <a:txBody>
-                    <a:bodyPr/>
-                    <a:lstStyle/>
-                    <a:p>
-                      <a:pPr algn="ctr" rtl="0"/>
-                      <a:r>
-                        <a:rPr lang="pt-BR"/>
-                        <a:t>2</a:t>
-                      </a:r>
-                      <a:endParaRPr lang="pt-BR"/>
-                    </a:p>
-                  </a:txBody>
-                  <a:tcPr/>
-                </a:tc>
-                <a:tc>
-                  <a:txBody>
-                    <a:bodyPr/>
-                    <a:lstStyle/>
-                    <a:p>
-                      <a:pPr algn="ctr" rtl="0"/>
-                      <a:r>
-                        <a:rPr lang="pt-BR"/>
-                        <a:t>1</a:t>
-                      </a:r>
-                      <a:endParaRPr lang="pt-BR"/>
-                    </a:p>
-                  </a:txBody>
-                  <a:tcPr/>
-                </a:tc>
-              </a:tr>
-              <a:tr h="370840">
-                <a:tc>
-                  <a:txBody>
-                    <a:bodyPr/>
-                    <a:lstStyle/>
-                    <a:p>
-                      <a:pPr algn="ctr" rtl="0"/>
-                      <a:r>
-                        <a:rPr lang="pt-BR"/>
-                        <a:t>1</a:t>
-                      </a:r>
-                      <a:endParaRPr lang="pt-BR"/>
-                    </a:p>
-                  </a:txBody>
-                  <a:tcPr/>
-                </a:tc>
-                <a:tc>
-                  <a:txBody>
-                    <a:bodyPr/>
-                    <a:lstStyle/>
-                    <a:p>
-                      <a:pPr algn="ctr" rtl="0"/>
-                      <a:r>
-                        <a:rPr lang="pt-BR"/>
-                        <a:t>0</a:t>
-                      </a:r>
-                      <a:endParaRPr lang="pt-BR"/>
-                    </a:p>
-                  </a:txBody>
-                  <a:tcPr/>
-                </a:tc>
-                <a:tc>
-                  <a:txBody>
-                    <a:bodyPr/>
-                    <a:lstStyle/>
-                    <a:p>
-                      <a:pPr algn="ctr" rtl="0"/>
-                      <a:r>
-                        <a:rPr lang="pt-BR"/>
-                        <a:t>1</a:t>
-                      </a:r>
-                      <a:endParaRPr lang="pt-BR"/>
-                    </a:p>
-                  </a:txBody>
-                  <a:tcPr/>
-                </a:tc>
-                <a:tc>
-                  <a:txBody>
-                    <a:bodyPr/>
-                    <a:lstStyle/>
-                    <a:p>
-                      <a:pPr algn="ctr" rtl="0"/>
-                      <a:r>
-                        <a:rPr lang="pt-BR"/>
-                        <a:t>0</a:t>
-                      </a:r>
-                      <a:endParaRPr lang="pt-BR"/>
-                    </a:p>
-                  </a:txBody>
-                  <a:tcPr/>
-                </a:tc>
-                <a:tc>
-                  <a:txBody>
-                    <a:bodyPr/>
-                    <a:lstStyle/>
-                    <a:p>
-                      <a:pPr algn="ctr" rtl="0"/>
-                      <a:r>
-                        <a:rPr lang="pt-BR"/>
-                        <a:t>1</a:t>
-                      </a:r>
-                      <a:endParaRPr lang="pt-BR"/>
-                    </a:p>
-                  </a:txBody>
-                  <a:tcPr/>
-                </a:tc>
-                <a:tc>
-                  <a:txBody>
-                    <a:bodyPr/>
-                    <a:lstStyle/>
-                    <a:p>
-                      <a:pPr algn="ctr" rtl="0"/>
-                      <a:r>
-                        <a:rPr lang="pt-BR"/>
-                        <a:t>0</a:t>
-                      </a:r>
-                      <a:endParaRPr lang="pt-BR"/>
-                    </a:p>
-                  </a:txBody>
-                  <a:tcPr/>
-                </a:tc>
-                <a:tc>
-                  <a:txBody>
-                    <a:bodyPr/>
-                    <a:lstStyle/>
-                    <a:p>
-                      <a:pPr algn="ctr" rtl="0"/>
-                      <a:r>
-                        <a:rPr lang="pt-BR"/>
-                        <a:t>0</a:t>
-                      </a:r>
-                      <a:endParaRPr lang="pt-BR"/>
-                    </a:p>
-                  </a:txBody>
-                  <a:tcPr/>
-                </a:tc>
-                <a:tc>
-                  <a:txBody>
-                    <a:bodyPr/>
-                    <a:lstStyle/>
-                    <a:p>
-                      <a:pPr algn="ctr" rtl="0"/>
-                      <a:r>
-                        <a:rPr lang="pt-BR"/>
-                        <a:t>0</a:t>
-                      </a:r>
-                      <a:endParaRPr lang="pt-BR"/>
-                    </a:p>
-                  </a:txBody>
-                  <a:tcPr/>
-                </a:tc>
-              </a:tr>
-            </a:tbl>
-          </a:graphicData>
-        </a:graphic>
-      </p:graphicFrame>
-      <p:sp>
-        <p:nvSpPr>
-          <p:cNvPr id="12" name="TextBox 11"/>
-          <p:cNvSpPr txBox="1"/>
-          <p:nvPr/>
-        </p:nvSpPr>
-        <p:spPr>
-          <a:xfrm>
-            <a:off x="2741421" y="4462323"/>
-            <a:ext cx="3746538" cy="307777"/>
-          </a:xfrm>
-          <a:prstGeom prst="rect">
-            <a:avLst/>
-          </a:prstGeom>
-          <a:noFill/>
-        </p:spPr>
-        <p:txBody>
-          <a:bodyPr wrap="none" rtlCol="0">
-            <a:spAutoFit/>
-          </a:bodyPr>
-          <a:lstStyle/>
-          <a:p>
-            <a:pPr rtl="0"/>
-            <a:r>
-              <a:rPr lang="pt-BR" sz="1400"/>
-              <a:t>Decimal 168 é escrito como 10101000 em binário</a:t>
-            </a:r>
-            <a:endParaRPr lang="pt-BR" sz="1400"/>
-          </a:p>
-        </p:txBody>
-      </p:sp>
+      </p:pic>
     </p:spTree>
   </p:cSld>
   <p:clrMapOvr>
@@ -30981,7 +30950,7 @@
             </a:br>
             <a:r>
               <a:rPr lang="pt-BR" sz="2400"/>
-              <a:t> Enderecos IPv4</a:t>
+              <a:t>Enderecos IPv4</a:t>
             </a:r>
             <a:endParaRPr lang="pt-BR" sz="2400"/>
           </a:p>
@@ -30999,27 +30968,74 @@
         </p:nvSpPr>
         <p:spPr>
           <a:xfrm>
-            <a:off x="474662" y="861238"/>
-            <a:ext cx="8280057" cy="1069162"/>
+            <a:off x="102870" y="763905"/>
+            <a:ext cx="8820150" cy="1680210"/>
           </a:xfrm>
         </p:spPr>
         <p:txBody>
           <a:bodyPr/>
           <a:lstStyle/>
           <a:p>
-            <a:pPr marL="342900" indent="-342900" algn="l" rtl="0">
+            <a:pPr marL="0" indent="0" algn="ctr" rtl="0">
               <a:buFont typeface="Arial" panose="020B0604020202020204" pitchFamily="34" charset="0"/>
-              <a:buChar char="•"/>
             </a:pPr>
             <a:r>
-              <a:rPr lang="pt-BR" sz="1800">
+              <a:rPr lang="pt-BR" sz="2500">
                 <a:solidFill>
                   <a:srgbClr val="000000"/>
                 </a:solidFill>
               </a:rPr>
-              <a:t>Roteadores e computadores só entendem binários, enquanto humanos trabalham em decimal. É importante que você obtenha uma compreensão completa desses dois sistemas de numeração e como eles são usados na rede.</a:t>
+              <a:t>Roteadores e Computadores só entendem </a:t>
             </a:r>
-            <a:endParaRPr lang="pt-BR" sz="1800">
+            <a:r>
+              <a:rPr lang="pt-BR" sz="2500" b="1">
+                <a:solidFill>
+                  <a:srgbClr val="FF0000"/>
+                </a:solidFill>
+              </a:rPr>
+              <a:t>Binários</a:t>
+            </a:r>
+            <a:r>
+              <a:rPr lang="pt-BR" sz="2500">
+                <a:solidFill>
+                  <a:srgbClr val="000000"/>
+                </a:solidFill>
+              </a:rPr>
+              <a:t>, enquanto humanos trabalham em </a:t>
+            </a:r>
+            <a:r>
+              <a:rPr lang="pt-BR" sz="2500" b="1">
+                <a:solidFill>
+                  <a:srgbClr val="FF0000"/>
+                </a:solidFill>
+              </a:rPr>
+              <a:t>Decimal</a:t>
+            </a:r>
+            <a:r>
+              <a:rPr lang="pt-BR" sz="2500">
+                <a:solidFill>
+                  <a:srgbClr val="000000"/>
+                </a:solidFill>
+              </a:rPr>
+              <a:t>. É importante que você obtenha uma </a:t>
+            </a:r>
+            <a:r>
+              <a:rPr lang="pt-BR" sz="2500" b="1">
+                <a:solidFill>
+                  <a:srgbClr val="0070C0"/>
+                </a:solidFill>
+              </a:rPr>
+              <a:t>compreensão completa</a:t>
+            </a:r>
+            <a:r>
+              <a:rPr lang="pt-BR" sz="2500">
+                <a:solidFill>
+                  <a:srgbClr val="000000"/>
+                </a:solidFill>
+              </a:rPr>
+              <a:t> desses dois sistemas de numeração e como eles são usados na rede.</a:t>
+            </a:r>
+            <a:endParaRPr lang="pt-BR" sz="2500">
               <a:solidFill>
                 <a:srgbClr val="000000"/>
               </a:solidFill>
@@ -31043,8 +31059,8 @@
         </p:blipFill>
         <p:spPr>
           <a:xfrm>
-            <a:off x="670368" y="2027902"/>
-            <a:ext cx="7803263" cy="1995265"/>
+            <a:off x="102870" y="2454910"/>
+            <a:ext cx="8856345" cy="2264410"/>
           </a:xfrm>
           <a:prstGeom prst="rect">
             <a:avLst/>
